--- a/Cao học - NT2303/Quantum & security.pptx
+++ b/Cao học - NT2303/Quantum & security.pptx
@@ -5,15 +5,17 @@
     <p:sldMasterId id="2147483648" r:id="rId1"/>
   </p:sldMasterIdLst>
   <p:notesMasterIdLst>
-    <p:notesMasterId r:id="rId8"/>
+    <p:notesMasterId r:id="rId10"/>
   </p:notesMasterIdLst>
   <p:sldIdLst>
-    <p:sldId id="380" r:id="rId2"/>
-    <p:sldId id="381" r:id="rId3"/>
-    <p:sldId id="382" r:id="rId4"/>
-    <p:sldId id="385" r:id="rId5"/>
-    <p:sldId id="383" r:id="rId6"/>
-    <p:sldId id="384" r:id="rId7"/>
+    <p:sldId id="387" r:id="rId2"/>
+    <p:sldId id="386" r:id="rId3"/>
+    <p:sldId id="380" r:id="rId4"/>
+    <p:sldId id="381" r:id="rId5"/>
+    <p:sldId id="382" r:id="rId6"/>
+    <p:sldId id="385" r:id="rId7"/>
+    <p:sldId id="383" r:id="rId8"/>
+    <p:sldId id="384" r:id="rId9"/>
   </p:sldIdLst>
   <p:sldSz cx="12192000" cy="6858000"/>
   <p:notesSz cx="6858000" cy="9144000"/>
@@ -202,7 +204,7 @@
           <a:p>
             <a:fld id="{5361D66D-790A-42FE-9F35-47D6C83EFAA2}" type="datetimeFigureOut">
               <a:rPr lang="vi-VN" smtClean="0"/>
-              <a:t>2/6/26</a:t>
+              <a:t>28/6/26</a:t>
             </a:fld>
             <a:endParaRPr lang="vi-VN"/>
           </a:p>
@@ -616,7 +618,7 @@
           <a:p>
             <a:fld id="{FC4ADBB0-DFBB-4DCA-A0C8-E8E421A3A1BE}" type="datetime1">
               <a:rPr lang="vi-VN" smtClean="0"/>
-              <a:t>2/6/26</a:t>
+              <a:t>28/6/26</a:t>
             </a:fld>
             <a:endParaRPr lang="vi-VN"/>
           </a:p>
@@ -814,7 +816,7 @@
           <a:p>
             <a:fld id="{359BE2F6-B0D3-466A-82B2-ABEFC48B3338}" type="datetime1">
               <a:rPr lang="vi-VN" smtClean="0"/>
-              <a:t>2/6/26</a:t>
+              <a:t>28/6/26</a:t>
             </a:fld>
             <a:endParaRPr lang="vi-VN"/>
           </a:p>
@@ -1022,7 +1024,7 @@
           <a:p>
             <a:fld id="{BC74DA87-581A-4368-87FF-97BD13CE399D}" type="datetime1">
               <a:rPr lang="vi-VN" smtClean="0"/>
-              <a:t>2/6/26</a:t>
+              <a:t>28/6/26</a:t>
             </a:fld>
             <a:endParaRPr lang="vi-VN"/>
           </a:p>
@@ -1220,7 +1222,7 @@
           <a:p>
             <a:fld id="{3844ABA2-F96A-4642-AB00-30B67DAE18DC}" type="datetime1">
               <a:rPr lang="vi-VN" smtClean="0"/>
-              <a:t>2/6/26</a:t>
+              <a:t>28/6/26</a:t>
             </a:fld>
             <a:endParaRPr lang="vi-VN"/>
           </a:p>
@@ -1495,7 +1497,7 @@
           <a:p>
             <a:fld id="{38B10CBF-AA1C-442C-8908-2E147AAB595F}" type="datetime1">
               <a:rPr lang="vi-VN" smtClean="0"/>
-              <a:t>2/6/26</a:t>
+              <a:t>28/6/26</a:t>
             </a:fld>
             <a:endParaRPr lang="vi-VN"/>
           </a:p>
@@ -1760,7 +1762,7 @@
           <a:p>
             <a:fld id="{A375865D-2E54-4B89-8689-1A851FA9B0C2}" type="datetime1">
               <a:rPr lang="vi-VN" smtClean="0"/>
-              <a:t>2/6/26</a:t>
+              <a:t>28/6/26</a:t>
             </a:fld>
             <a:endParaRPr lang="vi-VN"/>
           </a:p>
@@ -2172,7 +2174,7 @@
           <a:p>
             <a:fld id="{19BFCA60-D758-4057-AC39-283123382124}" type="datetime1">
               <a:rPr lang="vi-VN" smtClean="0"/>
-              <a:t>2/6/26</a:t>
+              <a:t>28/6/26</a:t>
             </a:fld>
             <a:endParaRPr lang="vi-VN"/>
           </a:p>
@@ -2313,7 +2315,7 @@
           <a:p>
             <a:fld id="{7A2B3298-1CF5-4179-AF41-9A5CDD968281}" type="datetime1">
               <a:rPr lang="vi-VN" smtClean="0"/>
-              <a:t>2/6/26</a:t>
+              <a:t>28/6/26</a:t>
             </a:fld>
             <a:endParaRPr lang="vi-VN"/>
           </a:p>
@@ -2426,7 +2428,7 @@
           <a:p>
             <a:fld id="{9C6816FA-DA8A-46A1-935B-81637D3DCF4F}" type="datetime1">
               <a:rPr lang="vi-VN" smtClean="0"/>
-              <a:t>2/6/26</a:t>
+              <a:t>28/6/26</a:t>
             </a:fld>
             <a:endParaRPr lang="vi-VN"/>
           </a:p>
@@ -2737,7 +2739,7 @@
           <a:p>
             <a:fld id="{E74DEEF0-E224-4B78-9425-C6F80B2F1143}" type="datetime1">
               <a:rPr lang="vi-VN" smtClean="0"/>
-              <a:t>2/6/26</a:t>
+              <a:t>28/6/26</a:t>
             </a:fld>
             <a:endParaRPr lang="vi-VN"/>
           </a:p>
@@ -3025,7 +3027,7 @@
           <a:p>
             <a:fld id="{7EFCE8C9-A9C3-4798-8CE0-26142FD84B4C}" type="datetime1">
               <a:rPr lang="vi-VN" smtClean="0"/>
-              <a:t>2/6/26</a:t>
+              <a:t>28/6/26</a:t>
             </a:fld>
             <a:endParaRPr lang="vi-VN"/>
           </a:p>
@@ -3266,7 +3268,7 @@
           <a:p>
             <a:fld id="{8E3E2CA6-4B42-4742-895B-98FFB0FAE4AD}" type="datetime1">
               <a:rPr lang="vi-VN" smtClean="0"/>
-              <a:t>2/6/26</a:t>
+              <a:t>28/6/26</a:t>
             </a:fld>
             <a:endParaRPr lang="vi-VN"/>
           </a:p>
@@ -3686,10 +3688,69 @@
       </p:grpSpPr>
       <p:sp>
         <p:nvSpPr>
+          <p:cNvPr id="2" name="Title 1">
+            <a:extLst>
+              <a:ext uri="{FF2B5EF4-FFF2-40B4-BE49-F238E27FC236}">
+                <a16:creationId xmlns:a16="http://schemas.microsoft.com/office/drawing/2014/main" id="{049AF76F-6E09-745D-5FC3-42F9928EC4B6}"/>
+              </a:ext>
+            </a:extLst>
+          </p:cNvPr>
+          <p:cNvSpPr>
+            <a:spLocks noGrp="1"/>
+          </p:cNvSpPr>
+          <p:nvPr>
+            <p:ph type="title"/>
+          </p:nvPr>
+        </p:nvSpPr>
+        <p:spPr/>
+        <p:txBody>
+          <a:bodyPr/>
+          <a:lstStyle/>
+          <a:p>
+            <a:r>
+              <a:rPr lang="en-VN"/>
+              <a:t>About me</a:t>
+            </a:r>
+          </a:p>
+        </p:txBody>
+      </p:sp>
+      <p:sp>
+        <p:nvSpPr>
+          <p:cNvPr id="3" name="Content Placeholder 2">
+            <a:extLst>
+              <a:ext uri="{FF2B5EF4-FFF2-40B4-BE49-F238E27FC236}">
+                <a16:creationId xmlns:a16="http://schemas.microsoft.com/office/drawing/2014/main" id="{B8BE4BDE-A282-AD27-7B54-9429E08EB73D}"/>
+              </a:ext>
+            </a:extLst>
+          </p:cNvPr>
+          <p:cNvSpPr>
+            <a:spLocks noGrp="1"/>
+          </p:cNvSpPr>
+          <p:nvPr>
+            <p:ph idx="1"/>
+          </p:nvPr>
+        </p:nvSpPr>
+        <p:spPr/>
+        <p:txBody>
+          <a:bodyPr/>
+          <a:lstStyle/>
+          <a:p>
+            <a:pPr marL="0" indent="0">
+              <a:buNone/>
+            </a:pPr>
+            <a:r>
+              <a:rPr lang="en-VN"/>
+              <a:t>Open slide Personal/Intro.pptx</a:t>
+            </a:r>
+          </a:p>
+        </p:txBody>
+      </p:sp>
+      <p:sp>
+        <p:nvSpPr>
           <p:cNvPr id="4" name="Slide Number Placeholder 3">
             <a:extLst>
               <a:ext uri="{FF2B5EF4-FFF2-40B4-BE49-F238E27FC236}">
-                <a16:creationId xmlns:a16="http://schemas.microsoft.com/office/drawing/2014/main" id="{527FC7CC-EC4E-E2E6-C574-3A3BD9F9A6A5}"/>
+                <a16:creationId xmlns:a16="http://schemas.microsoft.com/office/drawing/2014/main" id="{B6A82F06-B744-0687-5306-A2486A6EC172}"/>
               </a:ext>
             </a:extLst>
           </p:cNvPr>
@@ -3708,6 +3769,199 @@
             <a:fld id="{71331178-9F85-4EDF-BDD3-1E7064DA4C59}" type="slidenum">
               <a:rPr lang="vi-VN" smtClean="0"/>
               <a:t>1</a:t>
+            </a:fld>
+            <a:endParaRPr lang="vi-VN"/>
+          </a:p>
+        </p:txBody>
+      </p:sp>
+    </p:spTree>
+    <p:extLst>
+      <p:ext uri="{BB962C8B-B14F-4D97-AF65-F5344CB8AC3E}">
+        <p14:creationId xmlns:p14="http://schemas.microsoft.com/office/powerpoint/2010/main" val="3410043826"/>
+      </p:ext>
+    </p:extLst>
+  </p:cSld>
+  <p:clrMapOvr>
+    <a:masterClrMapping/>
+  </p:clrMapOvr>
+</p:sld>
+</file>
+
+<file path=ppt/slides/slide2.xml><?xml version="1.0" encoding="utf-8"?>
+<p:sld xmlns:a="http://schemas.openxmlformats.org/drawingml/2006/main" xmlns:r="http://schemas.openxmlformats.org/officeDocument/2006/relationships" xmlns:p="http://schemas.openxmlformats.org/presentationml/2006/main">
+  <p:cSld>
+    <p:spTree>
+      <p:nvGrpSpPr>
+        <p:cNvPr id="1" name=""/>
+        <p:cNvGrpSpPr/>
+        <p:nvPr/>
+      </p:nvGrpSpPr>
+      <p:grpSpPr>
+        <a:xfrm>
+          <a:off x="0" y="0"/>
+          <a:ext cx="0" cy="0"/>
+          <a:chOff x="0" y="0"/>
+          <a:chExt cx="0" cy="0"/>
+        </a:xfrm>
+      </p:grpSpPr>
+      <p:sp>
+        <p:nvSpPr>
+          <p:cNvPr id="2" name="Title 1">
+            <a:extLst>
+              <a:ext uri="{FF2B5EF4-FFF2-40B4-BE49-F238E27FC236}">
+                <a16:creationId xmlns:a16="http://schemas.microsoft.com/office/drawing/2014/main" id="{CE5068B0-4A2C-BDC3-BAF8-264195EC6561}"/>
+              </a:ext>
+            </a:extLst>
+          </p:cNvPr>
+          <p:cNvSpPr>
+            <a:spLocks noGrp="1"/>
+          </p:cNvSpPr>
+          <p:nvPr>
+            <p:ph type="title"/>
+          </p:nvPr>
+        </p:nvSpPr>
+        <p:spPr/>
+        <p:txBody>
+          <a:bodyPr/>
+          <a:lstStyle/>
+          <a:p>
+            <a:r>
+              <a:rPr lang="en-VN"/>
+              <a:t>Materials</a:t>
+            </a:r>
+          </a:p>
+        </p:txBody>
+      </p:sp>
+      <p:sp>
+        <p:nvSpPr>
+          <p:cNvPr id="4" name="Slide Number Placeholder 3">
+            <a:extLst>
+              <a:ext uri="{FF2B5EF4-FFF2-40B4-BE49-F238E27FC236}">
+                <a16:creationId xmlns:a16="http://schemas.microsoft.com/office/drawing/2014/main" id="{909FF05A-1A7D-1922-2C2E-A0A8B3413A37}"/>
+              </a:ext>
+            </a:extLst>
+          </p:cNvPr>
+          <p:cNvSpPr>
+            <a:spLocks noGrp="1"/>
+          </p:cNvSpPr>
+          <p:nvPr>
+            <p:ph type="sldNum" sz="quarter" idx="12"/>
+          </p:nvPr>
+        </p:nvSpPr>
+        <p:spPr/>
+        <p:txBody>
+          <a:bodyPr/>
+          <a:lstStyle/>
+          <a:p>
+            <a:fld id="{71331178-9F85-4EDF-BDD3-1E7064DA4C59}" type="slidenum">
+              <a:rPr lang="vi-VN" smtClean="0"/>
+              <a:t>2</a:t>
+            </a:fld>
+            <a:endParaRPr lang="vi-VN"/>
+          </a:p>
+        </p:txBody>
+      </p:sp>
+      <p:pic>
+        <p:nvPicPr>
+          <p:cNvPr id="1026" name="Picture 2">
+            <a:extLst>
+              <a:ext uri="{FF2B5EF4-FFF2-40B4-BE49-F238E27FC236}">
+                <a16:creationId xmlns:a16="http://schemas.microsoft.com/office/drawing/2014/main" id="{2E843D8B-1FBE-01FF-4EE9-022CD01E1941}"/>
+              </a:ext>
+            </a:extLst>
+          </p:cNvPr>
+          <p:cNvPicPr>
+            <a:picLocks noChangeAspect="1" noChangeArrowheads="1"/>
+          </p:cNvPicPr>
+          <p:nvPr/>
+        </p:nvPicPr>
+        <p:blipFill>
+          <a:blip r:embed="rId2">
+            <a:extLst>
+              <a:ext uri="{28A0092B-C50C-407E-A947-70E740481C1C}">
+                <a14:useLocalDpi xmlns:a14="http://schemas.microsoft.com/office/drawing/2010/main" val="0"/>
+              </a:ext>
+            </a:extLst>
+          </a:blip>
+          <a:srcRect/>
+          <a:stretch>
+            <a:fillRect/>
+          </a:stretch>
+        </p:blipFill>
+        <p:spPr bwMode="auto">
+          <a:xfrm>
+            <a:off x="8409122" y="177588"/>
+            <a:ext cx="2815203" cy="2815203"/>
+          </a:xfrm>
+          <a:prstGeom prst="rect">
+            <a:avLst/>
+          </a:prstGeom>
+          <a:noFill/>
+          <a:extLst>
+            <a:ext uri="{909E8E84-426E-40DD-AFC4-6F175D3DCCD1}">
+              <a14:hiddenFill xmlns:a14="http://schemas.microsoft.com/office/drawing/2010/main">
+                <a:solidFill>
+                  <a:srgbClr val="FFFFFF"/>
+                </a:solidFill>
+              </a14:hiddenFill>
+            </a:ext>
+          </a:extLst>
+        </p:spPr>
+      </p:pic>
+    </p:spTree>
+    <p:extLst>
+      <p:ext uri="{BB962C8B-B14F-4D97-AF65-F5344CB8AC3E}">
+        <p14:creationId xmlns:p14="http://schemas.microsoft.com/office/powerpoint/2010/main" val="2638643739"/>
+      </p:ext>
+    </p:extLst>
+  </p:cSld>
+  <p:clrMapOvr>
+    <a:masterClrMapping/>
+  </p:clrMapOvr>
+</p:sld>
+</file>
+
+<file path=ppt/slides/slide3.xml><?xml version="1.0" encoding="utf-8"?>
+<p:sld xmlns:a="http://schemas.openxmlformats.org/drawingml/2006/main" xmlns:r="http://schemas.openxmlformats.org/officeDocument/2006/relationships" xmlns:p="http://schemas.openxmlformats.org/presentationml/2006/main">
+  <p:cSld>
+    <p:spTree>
+      <p:nvGrpSpPr>
+        <p:cNvPr id="1" name=""/>
+        <p:cNvGrpSpPr/>
+        <p:nvPr/>
+      </p:nvGrpSpPr>
+      <p:grpSpPr>
+        <a:xfrm>
+          <a:off x="0" y="0"/>
+          <a:ext cx="0" cy="0"/>
+          <a:chOff x="0" y="0"/>
+          <a:chExt cx="0" cy="0"/>
+        </a:xfrm>
+      </p:grpSpPr>
+      <p:sp>
+        <p:nvSpPr>
+          <p:cNvPr id="4" name="Slide Number Placeholder 3">
+            <a:extLst>
+              <a:ext uri="{FF2B5EF4-FFF2-40B4-BE49-F238E27FC236}">
+                <a16:creationId xmlns:a16="http://schemas.microsoft.com/office/drawing/2014/main" id="{527FC7CC-EC4E-E2E6-C574-3A3BD9F9A6A5}"/>
+              </a:ext>
+            </a:extLst>
+          </p:cNvPr>
+          <p:cNvSpPr>
+            <a:spLocks noGrp="1"/>
+          </p:cNvSpPr>
+          <p:nvPr>
+            <p:ph type="sldNum" sz="quarter" idx="12"/>
+          </p:nvPr>
+        </p:nvSpPr>
+        <p:spPr/>
+        <p:txBody>
+          <a:bodyPr/>
+          <a:lstStyle/>
+          <a:p>
+            <a:fld id="{71331178-9F85-4EDF-BDD3-1E7064DA4C59}" type="slidenum">
+              <a:rPr lang="vi-VN" smtClean="0"/>
+              <a:t>3</a:t>
             </a:fld>
             <a:endParaRPr lang="vi-VN"/>
           </a:p>
@@ -4057,7 +4311,7 @@
 </p:sld>
 </file>
 
-<file path=ppt/slides/slide2.xml><?xml version="1.0" encoding="utf-8"?>
+<file path=ppt/slides/slide4.xml><?xml version="1.0" encoding="utf-8"?>
 <p:sld xmlns:a="http://schemas.openxmlformats.org/drawingml/2006/main" xmlns:r="http://schemas.openxmlformats.org/officeDocument/2006/relationships" xmlns:p="http://schemas.openxmlformats.org/presentationml/2006/main">
   <p:cSld>
     <p:spTree>
@@ -4130,7 +4384,7 @@
           <a:p>
             <a:fld id="{71331178-9F85-4EDF-BDD3-1E7064DA4C59}" type="slidenum">
               <a:rPr lang="vi-VN" smtClean="0"/>
-              <a:t>2</a:t>
+              <a:t>4</a:t>
             </a:fld>
             <a:endParaRPr lang="vi-VN"/>
           </a:p>
@@ -4275,7 +4529,7 @@
 </p:sld>
 </file>
 
-<file path=ppt/slides/slide3.xml><?xml version="1.0" encoding="utf-8"?>
+<file path=ppt/slides/slide5.xml><?xml version="1.0" encoding="utf-8"?>
 <p:sld xmlns:a="http://schemas.openxmlformats.org/drawingml/2006/main" xmlns:r="http://schemas.openxmlformats.org/officeDocument/2006/relationships" xmlns:p="http://schemas.openxmlformats.org/presentationml/2006/main">
   <p:cSld>
     <p:spTree>
@@ -4714,7 +4968,7 @@
           <a:p>
             <a:fld id="{71331178-9F85-4EDF-BDD3-1E7064DA4C59}" type="slidenum">
               <a:rPr lang="vi-VN" smtClean="0"/>
-              <a:t>3</a:t>
+              <a:t>5</a:t>
             </a:fld>
             <a:endParaRPr lang="vi-VN"/>
           </a:p>
@@ -4832,276 +5086,6 @@
 </p:sld>
 </file>
 
-<file path=ppt/slides/slide4.xml><?xml version="1.0" encoding="utf-8"?>
-<p:sld xmlns:a="http://schemas.openxmlformats.org/drawingml/2006/main" xmlns:r="http://schemas.openxmlformats.org/officeDocument/2006/relationships" xmlns:p="http://schemas.openxmlformats.org/presentationml/2006/main">
-  <p:cSld>
-    <p:spTree>
-      <p:nvGrpSpPr>
-        <p:cNvPr id="1" name=""/>
-        <p:cNvGrpSpPr/>
-        <p:nvPr/>
-      </p:nvGrpSpPr>
-      <p:grpSpPr>
-        <a:xfrm>
-          <a:off x="0" y="0"/>
-          <a:ext cx="0" cy="0"/>
-          <a:chOff x="0" y="0"/>
-          <a:chExt cx="0" cy="0"/>
-        </a:xfrm>
-      </p:grpSpPr>
-      <p:sp>
-        <p:nvSpPr>
-          <p:cNvPr id="2" name="Title 1">
-            <a:extLst>
-              <a:ext uri="{FF2B5EF4-FFF2-40B4-BE49-F238E27FC236}">
-                <a16:creationId xmlns:a16="http://schemas.microsoft.com/office/drawing/2014/main" id="{285DB057-F4D3-43B9-9976-F004D2058E2C}"/>
-              </a:ext>
-            </a:extLst>
-          </p:cNvPr>
-          <p:cNvSpPr>
-            <a:spLocks noGrp="1"/>
-          </p:cNvSpPr>
-          <p:nvPr>
-            <p:ph type="title"/>
-          </p:nvPr>
-        </p:nvSpPr>
-        <p:spPr/>
-        <p:txBody>
-          <a:bodyPr/>
-          <a:lstStyle/>
-          <a:p>
-            <a:r>
-              <a:rPr lang="en-VN"/>
-              <a:t>Introducing to quantum computing</a:t>
-            </a:r>
-          </a:p>
-        </p:txBody>
-      </p:sp>
-      <p:sp>
-        <p:nvSpPr>
-          <p:cNvPr id="3" name="Content Placeholder 2">
-            <a:extLst>
-              <a:ext uri="{FF2B5EF4-FFF2-40B4-BE49-F238E27FC236}">
-                <a16:creationId xmlns:a16="http://schemas.microsoft.com/office/drawing/2014/main" id="{92D28092-1D84-EA9B-F0E8-01F25A57BA6F}"/>
-              </a:ext>
-            </a:extLst>
-          </p:cNvPr>
-          <p:cNvSpPr>
-            <a:spLocks noGrp="1"/>
-          </p:cNvSpPr>
-          <p:nvPr>
-            <p:ph idx="1"/>
-          </p:nvPr>
-        </p:nvSpPr>
-        <p:spPr/>
-        <p:txBody>
-          <a:bodyPr/>
-          <a:lstStyle/>
-          <a:p>
-            <a:pPr marL="0" indent="0">
-              <a:buNone/>
-            </a:pPr>
-            <a:r>
-              <a:rPr lang="en-VN"/>
-              <a:t>Open slide S</a:t>
-            </a:r>
-            <a:r>
-              <a:rPr lang="en-US"/>
-              <a:t>E</a:t>
-            </a:r>
-            <a:r>
-              <a:rPr lang="en-VN"/>
-              <a:t>xxx-Quantum Computing/0.overview.pptx</a:t>
-            </a:r>
-          </a:p>
-        </p:txBody>
-      </p:sp>
-      <p:sp>
-        <p:nvSpPr>
-          <p:cNvPr id="4" name="Slide Number Placeholder 3">
-            <a:extLst>
-              <a:ext uri="{FF2B5EF4-FFF2-40B4-BE49-F238E27FC236}">
-                <a16:creationId xmlns:a16="http://schemas.microsoft.com/office/drawing/2014/main" id="{28999BFC-FE70-E542-3CD8-ABDCEC627DB8}"/>
-              </a:ext>
-            </a:extLst>
-          </p:cNvPr>
-          <p:cNvSpPr>
-            <a:spLocks noGrp="1"/>
-          </p:cNvSpPr>
-          <p:nvPr>
-            <p:ph type="sldNum" sz="quarter" idx="12"/>
-          </p:nvPr>
-        </p:nvSpPr>
-        <p:spPr/>
-        <p:txBody>
-          <a:bodyPr/>
-          <a:lstStyle/>
-          <a:p>
-            <a:fld id="{71331178-9F85-4EDF-BDD3-1E7064DA4C59}" type="slidenum">
-              <a:rPr lang="vi-VN" smtClean="0"/>
-              <a:t>4</a:t>
-            </a:fld>
-            <a:endParaRPr lang="vi-VN"/>
-          </a:p>
-        </p:txBody>
-      </p:sp>
-    </p:spTree>
-    <p:extLst>
-      <p:ext uri="{BB962C8B-B14F-4D97-AF65-F5344CB8AC3E}">
-        <p14:creationId xmlns:p14="http://schemas.microsoft.com/office/powerpoint/2010/main" val="4147990467"/>
-      </p:ext>
-    </p:extLst>
-  </p:cSld>
-  <p:clrMapOvr>
-    <a:masterClrMapping/>
-  </p:clrMapOvr>
-</p:sld>
-</file>
-
-<file path=ppt/slides/slide5.xml><?xml version="1.0" encoding="utf-8"?>
-<p:sld xmlns:a="http://schemas.openxmlformats.org/drawingml/2006/main" xmlns:r="http://schemas.openxmlformats.org/officeDocument/2006/relationships" xmlns:p="http://schemas.openxmlformats.org/presentationml/2006/main">
-  <p:cSld>
-    <p:spTree>
-      <p:nvGrpSpPr>
-        <p:cNvPr id="1" name=""/>
-        <p:cNvGrpSpPr/>
-        <p:nvPr/>
-      </p:nvGrpSpPr>
-      <p:grpSpPr>
-        <a:xfrm>
-          <a:off x="0" y="0"/>
-          <a:ext cx="0" cy="0"/>
-          <a:chOff x="0" y="0"/>
-          <a:chExt cx="0" cy="0"/>
-        </a:xfrm>
-      </p:grpSpPr>
-      <p:sp>
-        <p:nvSpPr>
-          <p:cNvPr id="2" name="Title 1">
-            <a:extLst>
-              <a:ext uri="{FF2B5EF4-FFF2-40B4-BE49-F238E27FC236}">
-                <a16:creationId xmlns:a16="http://schemas.microsoft.com/office/drawing/2014/main" id="{2A56CFF4-D109-C22D-806A-8D9DA1A75B17}"/>
-              </a:ext>
-            </a:extLst>
-          </p:cNvPr>
-          <p:cNvSpPr>
-            <a:spLocks noGrp="1"/>
-          </p:cNvSpPr>
-          <p:nvPr>
-            <p:ph type="title"/>
-          </p:nvPr>
-        </p:nvSpPr>
-        <p:spPr>
-          <a:xfrm>
-            <a:off x="838200" y="365125"/>
-            <a:ext cx="10515600" cy="2152297"/>
-          </a:xfrm>
-        </p:spPr>
-        <p:txBody>
-          <a:bodyPr>
-            <a:normAutofit/>
-          </a:bodyPr>
-          <a:lstStyle/>
-          <a:p>
-            <a:r>
-              <a:rPr lang="en-VN" sz="4000"/>
-              <a:t>Why quantum do something better than classical?</a:t>
-            </a:r>
-            <a:br>
-              <a:rPr lang="en-VN" sz="4000"/>
-            </a:br>
-            <a:r>
-              <a:rPr lang="en-VN" sz="4000"/>
-              <a:t>See quantum / classical Turing machine</a:t>
-            </a:r>
-          </a:p>
-        </p:txBody>
-      </p:sp>
-      <p:sp>
-        <p:nvSpPr>
-          <p:cNvPr id="4" name="Slide Number Placeholder 3">
-            <a:extLst>
-              <a:ext uri="{FF2B5EF4-FFF2-40B4-BE49-F238E27FC236}">
-                <a16:creationId xmlns:a16="http://schemas.microsoft.com/office/drawing/2014/main" id="{7964341D-8E53-40F1-2929-27C21A22C692}"/>
-              </a:ext>
-            </a:extLst>
-          </p:cNvPr>
-          <p:cNvSpPr>
-            <a:spLocks noGrp="1"/>
-          </p:cNvSpPr>
-          <p:nvPr>
-            <p:ph type="sldNum" sz="quarter" idx="12"/>
-          </p:nvPr>
-        </p:nvSpPr>
-        <p:spPr/>
-        <p:txBody>
-          <a:bodyPr/>
-          <a:lstStyle/>
-          <a:p>
-            <a:fld id="{71331178-9F85-4EDF-BDD3-1E7064DA4C59}" type="slidenum">
-              <a:rPr lang="vi-VN" smtClean="0"/>
-              <a:t>5</a:t>
-            </a:fld>
-            <a:endParaRPr lang="vi-VN"/>
-          </a:p>
-        </p:txBody>
-      </p:sp>
-      <p:sp>
-        <p:nvSpPr>
-          <p:cNvPr id="5" name="TextBox 4">
-            <a:extLst>
-              <a:ext uri="{FF2B5EF4-FFF2-40B4-BE49-F238E27FC236}">
-                <a16:creationId xmlns:a16="http://schemas.microsoft.com/office/drawing/2014/main" id="{DC99525B-0821-C234-6142-4727401C1064}"/>
-              </a:ext>
-            </a:extLst>
-          </p:cNvPr>
-          <p:cNvSpPr txBox="1"/>
-          <p:nvPr/>
-        </p:nvSpPr>
-        <p:spPr>
-          <a:xfrm>
-            <a:off x="838199" y="2194256"/>
-            <a:ext cx="8983133" cy="461665"/>
-          </a:xfrm>
-          <a:prstGeom prst="rect">
-            <a:avLst/>
-          </a:prstGeom>
-          <a:noFill/>
-        </p:spPr>
-        <p:txBody>
-          <a:bodyPr wrap="square">
-            <a:spAutoFit/>
-          </a:bodyPr>
-          <a:lstStyle/>
-          <a:p>
-            <a:r>
-              <a:rPr lang="en-VN" sz="2400"/>
-              <a:t>Open slide S</a:t>
-            </a:r>
-            <a:r>
-              <a:rPr lang="en-US" sz="2400"/>
-              <a:t>E</a:t>
-            </a:r>
-            <a:r>
-              <a:rPr lang="en-VN" sz="2400"/>
-              <a:t>xxx-Quantum Computing/x.quantum_complexity.pptx </a:t>
-            </a:r>
-          </a:p>
-        </p:txBody>
-      </p:sp>
-    </p:spTree>
-    <p:extLst>
-      <p:ext uri="{BB962C8B-B14F-4D97-AF65-F5344CB8AC3E}">
-        <p14:creationId xmlns:p14="http://schemas.microsoft.com/office/powerpoint/2010/main" val="1083437393"/>
-      </p:ext>
-    </p:extLst>
-  </p:cSld>
-  <p:clrMapOvr>
-    <a:masterClrMapping/>
-  </p:clrMapOvr>
-</p:sld>
-</file>
-
 <file path=ppt/slides/slide6.xml><?xml version="1.0" encoding="utf-8"?>
 <p:sld xmlns:a="http://schemas.openxmlformats.org/drawingml/2006/main" xmlns:r="http://schemas.openxmlformats.org/officeDocument/2006/relationships" xmlns:p="http://schemas.openxmlformats.org/presentationml/2006/main">
   <p:cSld>
@@ -5124,7 +5108,7 @@
           <p:cNvPr id="2" name="Title 1">
             <a:extLst>
               <a:ext uri="{FF2B5EF4-FFF2-40B4-BE49-F238E27FC236}">
-                <a16:creationId xmlns:a16="http://schemas.microsoft.com/office/drawing/2014/main" id="{21E76F00-1217-7E21-0BCD-2A64BD2A746C}"/>
+                <a16:creationId xmlns:a16="http://schemas.microsoft.com/office/drawing/2014/main" id="{285DB057-F4D3-43B9-9976-F004D2058E2C}"/>
               </a:ext>
             </a:extLst>
           </p:cNvPr>
@@ -5142,7 +5126,7 @@
           <a:p>
             <a:r>
               <a:rPr lang="en-VN"/>
-              <a:t>Example quantum algorithm: Quantum walk</a:t>
+              <a:t>Introducing to quantum computing</a:t>
             </a:r>
           </a:p>
         </p:txBody>
@@ -5152,7 +5136,7 @@
           <p:cNvPr id="3" name="Content Placeholder 2">
             <a:extLst>
               <a:ext uri="{FF2B5EF4-FFF2-40B4-BE49-F238E27FC236}">
-                <a16:creationId xmlns:a16="http://schemas.microsoft.com/office/drawing/2014/main" id="{935F3575-E69B-E5B0-3079-974C4F521B2B}"/>
+                <a16:creationId xmlns:a16="http://schemas.microsoft.com/office/drawing/2014/main" id="{92D28092-1D84-EA9B-F0E8-01F25A57BA6F}"/>
               </a:ext>
             </a:extLst>
           </p:cNvPr>
@@ -5181,7 +5165,7 @@
             </a:r>
             <a:r>
               <a:rPr lang="en-VN"/>
-              <a:t>xxx-Quantum Computing/x.quantum_algo.pptx</a:t>
+              <a:t>xxx-Quantum Computing/0.overview.pptx</a:t>
             </a:r>
           </a:p>
         </p:txBody>
@@ -5191,7 +5175,7 @@
           <p:cNvPr id="4" name="Slide Number Placeholder 3">
             <a:extLst>
               <a:ext uri="{FF2B5EF4-FFF2-40B4-BE49-F238E27FC236}">
-                <a16:creationId xmlns:a16="http://schemas.microsoft.com/office/drawing/2014/main" id="{AE9C70B8-3502-3DB3-D076-D7076DB87235}"/>
+                <a16:creationId xmlns:a16="http://schemas.microsoft.com/office/drawing/2014/main" id="{28999BFC-FE70-E542-3CD8-ABDCEC627DB8}"/>
               </a:ext>
             </a:extLst>
           </p:cNvPr>
@@ -5210,6 +5194,276 @@
             <a:fld id="{71331178-9F85-4EDF-BDD3-1E7064DA4C59}" type="slidenum">
               <a:rPr lang="vi-VN" smtClean="0"/>
               <a:t>6</a:t>
+            </a:fld>
+            <a:endParaRPr lang="vi-VN"/>
+          </a:p>
+        </p:txBody>
+      </p:sp>
+    </p:spTree>
+    <p:extLst>
+      <p:ext uri="{BB962C8B-B14F-4D97-AF65-F5344CB8AC3E}">
+        <p14:creationId xmlns:p14="http://schemas.microsoft.com/office/powerpoint/2010/main" val="4147990467"/>
+      </p:ext>
+    </p:extLst>
+  </p:cSld>
+  <p:clrMapOvr>
+    <a:masterClrMapping/>
+  </p:clrMapOvr>
+</p:sld>
+</file>
+
+<file path=ppt/slides/slide7.xml><?xml version="1.0" encoding="utf-8"?>
+<p:sld xmlns:a="http://schemas.openxmlformats.org/drawingml/2006/main" xmlns:r="http://schemas.openxmlformats.org/officeDocument/2006/relationships" xmlns:p="http://schemas.openxmlformats.org/presentationml/2006/main">
+  <p:cSld>
+    <p:spTree>
+      <p:nvGrpSpPr>
+        <p:cNvPr id="1" name=""/>
+        <p:cNvGrpSpPr/>
+        <p:nvPr/>
+      </p:nvGrpSpPr>
+      <p:grpSpPr>
+        <a:xfrm>
+          <a:off x="0" y="0"/>
+          <a:ext cx="0" cy="0"/>
+          <a:chOff x="0" y="0"/>
+          <a:chExt cx="0" cy="0"/>
+        </a:xfrm>
+      </p:grpSpPr>
+      <p:sp>
+        <p:nvSpPr>
+          <p:cNvPr id="2" name="Title 1">
+            <a:extLst>
+              <a:ext uri="{FF2B5EF4-FFF2-40B4-BE49-F238E27FC236}">
+                <a16:creationId xmlns:a16="http://schemas.microsoft.com/office/drawing/2014/main" id="{2A56CFF4-D109-C22D-806A-8D9DA1A75B17}"/>
+              </a:ext>
+            </a:extLst>
+          </p:cNvPr>
+          <p:cNvSpPr>
+            <a:spLocks noGrp="1"/>
+          </p:cNvSpPr>
+          <p:nvPr>
+            <p:ph type="title"/>
+          </p:nvPr>
+        </p:nvSpPr>
+        <p:spPr>
+          <a:xfrm>
+            <a:off x="838200" y="365125"/>
+            <a:ext cx="10515600" cy="2152297"/>
+          </a:xfrm>
+        </p:spPr>
+        <p:txBody>
+          <a:bodyPr>
+            <a:normAutofit/>
+          </a:bodyPr>
+          <a:lstStyle/>
+          <a:p>
+            <a:r>
+              <a:rPr lang="en-VN" sz="4000"/>
+              <a:t>Why quantum do something better than classical?</a:t>
+            </a:r>
+            <a:br>
+              <a:rPr lang="en-VN" sz="4000"/>
+            </a:br>
+            <a:r>
+              <a:rPr lang="en-VN" sz="4000"/>
+              <a:t>See quantum / classical Turing machine</a:t>
+            </a:r>
+          </a:p>
+        </p:txBody>
+      </p:sp>
+      <p:sp>
+        <p:nvSpPr>
+          <p:cNvPr id="4" name="Slide Number Placeholder 3">
+            <a:extLst>
+              <a:ext uri="{FF2B5EF4-FFF2-40B4-BE49-F238E27FC236}">
+                <a16:creationId xmlns:a16="http://schemas.microsoft.com/office/drawing/2014/main" id="{7964341D-8E53-40F1-2929-27C21A22C692}"/>
+              </a:ext>
+            </a:extLst>
+          </p:cNvPr>
+          <p:cNvSpPr>
+            <a:spLocks noGrp="1"/>
+          </p:cNvSpPr>
+          <p:nvPr>
+            <p:ph type="sldNum" sz="quarter" idx="12"/>
+          </p:nvPr>
+        </p:nvSpPr>
+        <p:spPr/>
+        <p:txBody>
+          <a:bodyPr/>
+          <a:lstStyle/>
+          <a:p>
+            <a:fld id="{71331178-9F85-4EDF-BDD3-1E7064DA4C59}" type="slidenum">
+              <a:rPr lang="vi-VN" smtClean="0"/>
+              <a:t>7</a:t>
+            </a:fld>
+            <a:endParaRPr lang="vi-VN"/>
+          </a:p>
+        </p:txBody>
+      </p:sp>
+      <p:sp>
+        <p:nvSpPr>
+          <p:cNvPr id="5" name="TextBox 4">
+            <a:extLst>
+              <a:ext uri="{FF2B5EF4-FFF2-40B4-BE49-F238E27FC236}">
+                <a16:creationId xmlns:a16="http://schemas.microsoft.com/office/drawing/2014/main" id="{DC99525B-0821-C234-6142-4727401C1064}"/>
+              </a:ext>
+            </a:extLst>
+          </p:cNvPr>
+          <p:cNvSpPr txBox="1"/>
+          <p:nvPr/>
+        </p:nvSpPr>
+        <p:spPr>
+          <a:xfrm>
+            <a:off x="838199" y="2194256"/>
+            <a:ext cx="8983133" cy="461665"/>
+          </a:xfrm>
+          <a:prstGeom prst="rect">
+            <a:avLst/>
+          </a:prstGeom>
+          <a:noFill/>
+        </p:spPr>
+        <p:txBody>
+          <a:bodyPr wrap="square">
+            <a:spAutoFit/>
+          </a:bodyPr>
+          <a:lstStyle/>
+          <a:p>
+            <a:r>
+              <a:rPr lang="en-VN" sz="2400"/>
+              <a:t>Open slide S</a:t>
+            </a:r>
+            <a:r>
+              <a:rPr lang="en-US" sz="2400"/>
+              <a:t>E</a:t>
+            </a:r>
+            <a:r>
+              <a:rPr lang="en-VN" sz="2400"/>
+              <a:t>xxx-Quantum Computing/x.quantum_complexity.pptx </a:t>
+            </a:r>
+          </a:p>
+        </p:txBody>
+      </p:sp>
+    </p:spTree>
+    <p:extLst>
+      <p:ext uri="{BB962C8B-B14F-4D97-AF65-F5344CB8AC3E}">
+        <p14:creationId xmlns:p14="http://schemas.microsoft.com/office/powerpoint/2010/main" val="1083437393"/>
+      </p:ext>
+    </p:extLst>
+  </p:cSld>
+  <p:clrMapOvr>
+    <a:masterClrMapping/>
+  </p:clrMapOvr>
+</p:sld>
+</file>
+
+<file path=ppt/slides/slide8.xml><?xml version="1.0" encoding="utf-8"?>
+<p:sld xmlns:a="http://schemas.openxmlformats.org/drawingml/2006/main" xmlns:r="http://schemas.openxmlformats.org/officeDocument/2006/relationships" xmlns:p="http://schemas.openxmlformats.org/presentationml/2006/main">
+  <p:cSld>
+    <p:spTree>
+      <p:nvGrpSpPr>
+        <p:cNvPr id="1" name=""/>
+        <p:cNvGrpSpPr/>
+        <p:nvPr/>
+      </p:nvGrpSpPr>
+      <p:grpSpPr>
+        <a:xfrm>
+          <a:off x="0" y="0"/>
+          <a:ext cx="0" cy="0"/>
+          <a:chOff x="0" y="0"/>
+          <a:chExt cx="0" cy="0"/>
+        </a:xfrm>
+      </p:grpSpPr>
+      <p:sp>
+        <p:nvSpPr>
+          <p:cNvPr id="2" name="Title 1">
+            <a:extLst>
+              <a:ext uri="{FF2B5EF4-FFF2-40B4-BE49-F238E27FC236}">
+                <a16:creationId xmlns:a16="http://schemas.microsoft.com/office/drawing/2014/main" id="{21E76F00-1217-7E21-0BCD-2A64BD2A746C}"/>
+              </a:ext>
+            </a:extLst>
+          </p:cNvPr>
+          <p:cNvSpPr>
+            <a:spLocks noGrp="1"/>
+          </p:cNvSpPr>
+          <p:nvPr>
+            <p:ph type="title"/>
+          </p:nvPr>
+        </p:nvSpPr>
+        <p:spPr/>
+        <p:txBody>
+          <a:bodyPr/>
+          <a:lstStyle/>
+          <a:p>
+            <a:r>
+              <a:rPr lang="en-VN"/>
+              <a:t>Example quantum algorithm: Quantum walk</a:t>
+            </a:r>
+          </a:p>
+        </p:txBody>
+      </p:sp>
+      <p:sp>
+        <p:nvSpPr>
+          <p:cNvPr id="3" name="Content Placeholder 2">
+            <a:extLst>
+              <a:ext uri="{FF2B5EF4-FFF2-40B4-BE49-F238E27FC236}">
+                <a16:creationId xmlns:a16="http://schemas.microsoft.com/office/drawing/2014/main" id="{935F3575-E69B-E5B0-3079-974C4F521B2B}"/>
+              </a:ext>
+            </a:extLst>
+          </p:cNvPr>
+          <p:cNvSpPr>
+            <a:spLocks noGrp="1"/>
+          </p:cNvSpPr>
+          <p:nvPr>
+            <p:ph idx="1"/>
+          </p:nvPr>
+        </p:nvSpPr>
+        <p:spPr/>
+        <p:txBody>
+          <a:bodyPr/>
+          <a:lstStyle/>
+          <a:p>
+            <a:pPr marL="0" indent="0">
+              <a:buNone/>
+            </a:pPr>
+            <a:r>
+              <a:rPr lang="en-VN"/>
+              <a:t>Open slide S</a:t>
+            </a:r>
+            <a:r>
+              <a:rPr lang="en-US"/>
+              <a:t>E</a:t>
+            </a:r>
+            <a:r>
+              <a:rPr lang="en-VN"/>
+              <a:t>xxx-Quantum Computing/x.quantum_algo.pptx</a:t>
+            </a:r>
+          </a:p>
+        </p:txBody>
+      </p:sp>
+      <p:sp>
+        <p:nvSpPr>
+          <p:cNvPr id="4" name="Slide Number Placeholder 3">
+            <a:extLst>
+              <a:ext uri="{FF2B5EF4-FFF2-40B4-BE49-F238E27FC236}">
+                <a16:creationId xmlns:a16="http://schemas.microsoft.com/office/drawing/2014/main" id="{AE9C70B8-3502-3DB3-D076-D7076DB87235}"/>
+              </a:ext>
+            </a:extLst>
+          </p:cNvPr>
+          <p:cNvSpPr>
+            <a:spLocks noGrp="1"/>
+          </p:cNvSpPr>
+          <p:nvPr>
+            <p:ph type="sldNum" sz="quarter" idx="12"/>
+          </p:nvPr>
+        </p:nvSpPr>
+        <p:spPr/>
+        <p:txBody>
+          <a:bodyPr/>
+          <a:lstStyle/>
+          <a:p>
+            <a:fld id="{71331178-9F85-4EDF-BDD3-1E7064DA4C59}" type="slidenum">
+              <a:rPr lang="vi-VN" smtClean="0"/>
+              <a:t>8</a:t>
             </a:fld>
             <a:endParaRPr lang="vi-VN"/>
           </a:p>
